--- a/docs/lectures/05_10_lecture/lecture_powerpoint.pptx
+++ b/docs/lectures/05_10_lecture/lecture_powerpoint.pptx
@@ -3279,7 +3279,7 @@
             </a:pPr>
             <a:r>
               <a:rPr/>
-              <a:t>Lecture 10 - Multiple Regression</a:t>
+              <a:t>Lecture 10 -n</a:t>
             </a:r>
           </a:p>
         </p:txBody>
